--- a/examples/alvora/output/1_draft/deck.pptx
+++ b/examples/alvora/output/1_draft/deck.pptx
@@ -752,10 +752,18 @@
           </c:tx>
           <c:spPr>
             <a:solidFill>
-              <a:srgbClr val="0B1F3A"/>
+              <a:srgbClr val="8FA9CC"/>
             </a:solidFill>
           </c:spPr>
           <c:invertIfNegative val="0"/>
+          <c:dPt>
+            <c:idx val="3"/>
+            <c:spPr>
+              <a:solidFill>
+                <a:srgbClr val="0B1F3A"/>
+              </a:solidFill>
+            </c:spPr>
+          </c:dPt>
           <c:dLbls>
             <c:numFmt formatCode="#,##0.0;-#,##0.0" sourceLinked="0"/>
             <c:txPr>
@@ -868,7 +876,7 @@
       <c:valAx>
         <c:axId val="-2113994440"/>
         <c:scaling>
-          <c:max val="17.5"/>
+          <c:max val="26.25"/>
           <c:min val="0.0"/>
         </c:scaling>
         <c:delete/>
@@ -6475,7 +6483,7 @@
         <p:spPr>
           <a:xfrm>
             <a:off x="502920" y="6272784"/>
-            <a:ext cx="10088575" cy="402336"/>
+            <a:ext cx="8808415" cy="402336"/>
           </a:xfrm>
           <a:prstGeom prst="rect">
             <a:avLst/>
@@ -8300,7 +8308,7 @@
         <p:spPr>
           <a:xfrm>
             <a:off x="502920" y="6272784"/>
-            <a:ext cx="10088575" cy="402336"/>
+            <a:ext cx="8808415" cy="402336"/>
           </a:xfrm>
           <a:prstGeom prst="rect">
             <a:avLst/>
@@ -9193,7 +9201,7 @@
         <p:spPr>
           <a:xfrm>
             <a:off x="502920" y="1481328"/>
-            <a:ext cx="7390181" cy="274320"/>
+            <a:ext cx="11185855" cy="274320"/>
           </a:xfrm>
           <a:prstGeom prst="rect">
             <a:avLst/>
@@ -9233,7 +9241,7 @@
         </p:nvGraphicFramePr>
         <p:xfrm>
           <a:off x="502920" y="1901952"/>
-          <a:ext cx="7390181" cy="1914525"/>
+          <a:ext cx="11185855" cy="3491865"/>
         </p:xfrm>
         <a:graphic>
           <a:graphicData uri="http://schemas.openxmlformats.org/drawingml/2006/table">
@@ -9243,12 +9251,12 @@
               </a:tblPr>
               <a:tblGrid>
                 <a:gridCol w="4206240"/>
-                <a:gridCol w="716798"/>
-                <a:gridCol w="856875"/>
-                <a:gridCol w="805134"/>
-                <a:gridCol w="805134"/>
+                <a:gridCol w="2035429"/>
+                <a:gridCol w="2200986"/>
+                <a:gridCol w="1371600"/>
+                <a:gridCol w="1371600"/>
               </a:tblGrid>
-              <a:tr h="464058">
+              <a:tr h="523494">
                 <a:tc>
                   <a:txBody>
                     <a:bodyPr wrap="square"/>
@@ -9256,7 +9264,7 @@
                     <a:p>
                       <a:pPr algn="l"/>
                       <a:r>
-                        <a:rPr sz="1100" b="1">
+                        <a:rPr sz="1300" b="1">
                           <a:solidFill>
                             <a:srgbClr val="1E252D"/>
                           </a:solidFill>
@@ -9292,7 +9300,7 @@
                     <a:p>
                       <a:pPr algn="l"/>
                       <a:r>
-                        <a:rPr sz="1100" b="1">
+                        <a:rPr sz="1300" b="1">
                           <a:solidFill>
                             <a:srgbClr val="1E252D"/>
                           </a:solidFill>
@@ -9328,7 +9336,7 @@
                     <a:p>
                       <a:pPr algn="l"/>
                       <a:r>
-                        <a:rPr sz="1100" b="1">
+                        <a:rPr sz="1300" b="1">
                           <a:solidFill>
                             <a:srgbClr val="1E252D"/>
                           </a:solidFill>
@@ -9364,7 +9372,7 @@
                     <a:p>
                       <a:pPr algn="r"/>
                       <a:r>
-                        <a:rPr sz="1100" b="1">
+                        <a:rPr sz="1300" b="1">
                           <a:solidFill>
                             <a:srgbClr val="1E252D"/>
                           </a:solidFill>
@@ -9400,7 +9408,7 @@
                     <a:p>
                       <a:pPr algn="ctr"/>
                       <a:r>
-                        <a:rPr sz="1100" b="1">
+                        <a:rPr sz="1300" b="1">
                           <a:solidFill>
                             <a:srgbClr val="1E252D"/>
                           </a:solidFill>
@@ -9430,7 +9438,7 @@
                   </a:tcPr>
                 </a:tc>
               </a:tr>
-              <a:tr h="483489">
+              <a:tr h="860679">
                 <a:tc>
                   <a:txBody>
                     <a:bodyPr wrap="square"/>
@@ -9438,7 +9446,7 @@
                     <a:p>
                       <a:pPr algn="l"/>
                       <a:r>
-                        <a:rPr sz="1100" b="0">
+                        <a:rPr sz="1300" b="0">
                           <a:solidFill>
                             <a:srgbClr val="1E252D"/>
                           </a:solidFill>
@@ -9474,7 +9482,7 @@
                     <a:p>
                       <a:pPr algn="l"/>
                       <a:r>
-                        <a:rPr sz="1100" b="0">
+                        <a:rPr sz="1300" b="0">
                           <a:solidFill>
                             <a:srgbClr val="1E252D"/>
                           </a:solidFill>
@@ -9510,7 +9518,7 @@
                     <a:p>
                       <a:pPr algn="l"/>
                       <a:r>
-                        <a:rPr sz="1100" b="0">
+                        <a:rPr sz="1300" b="0">
                           <a:solidFill>
                             <a:srgbClr val="1E252D"/>
                           </a:solidFill>
@@ -9546,7 +9554,7 @@
                     <a:p>
                       <a:pPr algn="r"/>
                       <a:r>
-                        <a:rPr sz="1100" b="0">
+                        <a:rPr sz="1300" b="0">
                           <a:solidFill>
                             <a:srgbClr val="1E252D"/>
                           </a:solidFill>
@@ -9582,7 +9590,7 @@
                     <a:p>
                       <a:pPr algn="ctr"/>
                       <a:r>
-                        <a:rPr sz="1100" b="0">
+                        <a:rPr sz="1300" b="0">
                           <a:solidFill>
                             <a:srgbClr val="1E252D"/>
                           </a:solidFill>
@@ -9612,7 +9620,7 @@
                   </a:tcPr>
                 </a:tc>
               </a:tr>
-              <a:tr h="483489">
+              <a:tr h="1053846">
                 <a:tc>
                   <a:txBody>
                     <a:bodyPr wrap="square"/>
@@ -9620,7 +9628,7 @@
                     <a:p>
                       <a:pPr algn="l"/>
                       <a:r>
-                        <a:rPr sz="1100" b="0">
+                        <a:rPr sz="1300" b="0">
                           <a:solidFill>
                             <a:srgbClr val="1E252D"/>
                           </a:solidFill>
@@ -9656,7 +9664,7 @@
                     <a:p>
                       <a:pPr algn="l"/>
                       <a:r>
-                        <a:rPr sz="1100" b="0">
+                        <a:rPr sz="1300" b="0">
                           <a:solidFill>
                             <a:srgbClr val="1E252D"/>
                           </a:solidFill>
@@ -9692,7 +9700,7 @@
                     <a:p>
                       <a:pPr algn="l"/>
                       <a:r>
-                        <a:rPr sz="1100" b="0">
+                        <a:rPr sz="1300" b="0">
                           <a:solidFill>
                             <a:srgbClr val="1E252D"/>
                           </a:solidFill>
@@ -9728,7 +9736,7 @@
                     <a:p>
                       <a:pPr algn="r"/>
                       <a:r>
-                        <a:rPr sz="1100" b="0">
+                        <a:rPr sz="1300" b="0">
                           <a:solidFill>
                             <a:srgbClr val="1E252D"/>
                           </a:solidFill>
@@ -9764,7 +9772,7 @@
                     <a:p>
                       <a:pPr algn="ctr"/>
                       <a:r>
-                        <a:rPr sz="1100" b="0">
+                        <a:rPr sz="1300" b="0">
                           <a:solidFill>
                             <a:srgbClr val="1E252D"/>
                           </a:solidFill>
@@ -9794,7 +9802,7 @@
                   </a:tcPr>
                 </a:tc>
               </a:tr>
-              <a:tr h="483489">
+              <a:tr h="1053846">
                 <a:tc>
                   <a:txBody>
                     <a:bodyPr wrap="square"/>
@@ -9802,7 +9810,7 @@
                     <a:p>
                       <a:pPr algn="l"/>
                       <a:r>
-                        <a:rPr sz="1100" b="0">
+                        <a:rPr sz="1300" b="0">
                           <a:solidFill>
                             <a:srgbClr val="1E252D"/>
                           </a:solidFill>
@@ -9838,7 +9846,7 @@
                     <a:p>
                       <a:pPr algn="l"/>
                       <a:r>
-                        <a:rPr sz="1100" b="0">
+                        <a:rPr sz="1300" b="0">
                           <a:solidFill>
                             <a:srgbClr val="1E252D"/>
                           </a:solidFill>
@@ -9874,7 +9882,7 @@
                     <a:p>
                       <a:pPr algn="l"/>
                       <a:r>
-                        <a:rPr sz="1100" b="0">
+                        <a:rPr sz="1300" b="0">
                           <a:solidFill>
                             <a:srgbClr val="1E252D"/>
                           </a:solidFill>
@@ -9910,7 +9918,7 @@
                     <a:p>
                       <a:pPr algn="r"/>
                       <a:r>
-                        <a:rPr sz="1100" b="0">
+                        <a:rPr sz="1300" b="0">
                           <a:solidFill>
                             <a:srgbClr val="1E252D"/>
                           </a:solidFill>
@@ -9946,7 +9954,7 @@
                     <a:p>
                       <a:pPr algn="ctr"/>
                       <a:r>
-                        <a:rPr sz="1100" b="0">
+                        <a:rPr sz="1300" b="0">
                           <a:solidFill>
                             <a:srgbClr val="1E252D"/>
                           </a:solidFill>
@@ -9988,7 +9996,7 @@
         </p:nvSpPr>
         <p:spPr>
           <a:xfrm>
-            <a:off x="7371662" y="2488883"/>
+            <a:off x="10884103" y="2736914"/>
             <a:ext cx="237744" cy="237744"/>
           </a:xfrm>
           <a:prstGeom prst="ellipse">
@@ -10017,7 +10025,7 @@
         </p:nvSpPr>
         <p:spPr>
           <a:xfrm>
-            <a:off x="7371662" y="2972372"/>
+            <a:off x="10884103" y="3694176"/>
             <a:ext cx="237744" cy="237744"/>
           </a:xfrm>
           <a:prstGeom prst="ellipse">
@@ -10046,7 +10054,7 @@
         </p:nvSpPr>
         <p:spPr>
           <a:xfrm>
-            <a:off x="7371662" y="3455861"/>
+            <a:off x="10884103" y="4748022"/>
             <a:ext cx="237744" cy="237744"/>
           </a:xfrm>
           <a:prstGeom prst="ellipse">
@@ -10075,8 +10083,8 @@
         </p:nvCxnSpPr>
         <p:spPr>
           <a:xfrm>
-            <a:off x="8094269" y="1481328"/>
-            <a:ext cx="0" cy="4718304"/>
+            <a:off x="502920" y="5709856"/>
+            <a:ext cx="11185855" cy="0"/>
           </a:xfrm>
           <a:prstGeom prst="line">
             <a:avLst/>
@@ -10096,8 +10104,8 @@
         </p:nvSpPr>
         <p:spPr>
           <a:xfrm>
-            <a:off x="8322869" y="1481328"/>
-            <a:ext cx="3365906" cy="4718304"/>
+            <a:off x="502920" y="5847016"/>
+            <a:ext cx="5492344" cy="352616"/>
           </a:xfrm>
           <a:prstGeom prst="rect">
             <a:avLst/>
@@ -10110,22 +10118,13 @@
           </a:bodyPr>
           <a:lstStyle/>
           <a:p>
-            <a:pPr algn="l" marL="155448" indent="-155448">
+            <a:pPr algn="l">
               <a:lnSpc>
-                <a:spcPct val="108000"/>
+                <a:spcPct val="100000"/>
               </a:lnSpc>
-              <a:spcAft>
-                <a:spcPts val="800"/>
-              </a:spcAft>
-              <a:buClr>
-                <a:srgbClr val="1E252D"/>
-              </a:buClr>
-              <a:buSzPct val="100000"/>
-              <a:buFont typeface="Arial"/>
-              <a:buChar char="•"/>
-            </a:pPr>
-            <a:r>
-              <a:rPr sz="1200" b="0">
+            </a:pPr>
+            <a:r>
+              <a:rPr sz="1450" b="0">
                 <a:solidFill>
                   <a:srgbClr val="1E252D"/>
                 </a:solidFill>
@@ -10134,20 +10133,37 @@
               <a:t>Wave 1 is self-funding by Q4 2026</a:t>
             </a:r>
           </a:p>
-          <a:p>
-            <a:pPr algn="l" marL="155448" indent="-155448">
+        </p:txBody>
+      </p:sp>
+      <p:sp>
+        <p:nvSpPr>
+          <p:cNvPr id="12" name="cpe|commentary|text|11"/>
+          <p:cNvSpPr txBox="1"/>
+          <p:nvPr/>
+        </p:nvSpPr>
+        <p:spPr>
+          <a:xfrm>
+            <a:off x="6196432" y="5847016"/>
+            <a:ext cx="5492344" cy="352616"/>
+          </a:xfrm>
+          <a:prstGeom prst="rect">
+            <a:avLst/>
+          </a:prstGeom>
+          <a:noFill/>
+        </p:spPr>
+        <p:txBody>
+          <a:bodyPr wrap="square" lIns="0" rIns="0" tIns="0" bIns="0" anchor="t">
+            <a:noAutofit/>
+          </a:bodyPr>
+          <a:lstStyle/>
+          <a:p>
+            <a:pPr algn="l">
               <a:lnSpc>
-                <a:spcPct val="108000"/>
+                <a:spcPct val="100000"/>
               </a:lnSpc>
-              <a:buClr>
-                <a:srgbClr val="1E252D"/>
-              </a:buClr>
-              <a:buSzPct val="100000"/>
-              <a:buFont typeface="Arial"/>
-              <a:buChar char="•"/>
-            </a:pPr>
-            <a:r>
-              <a:rPr sz="1200" b="0">
+            </a:pPr>
+            <a:r>
+              <a:rPr sz="1450" b="0">
                 <a:solidFill>
                   <a:srgbClr val="1E252D"/>
                 </a:solidFill>
@@ -10263,7 +10279,7 @@
         <p:spPr>
           <a:xfrm>
             <a:off x="502920" y="6272784"/>
-            <a:ext cx="10088575" cy="402336"/>
+            <a:ext cx="8808415" cy="402336"/>
           </a:xfrm>
           <a:prstGeom prst="rect">
             <a:avLst/>
@@ -10968,7 +10984,7 @@
         <p:spPr>
           <a:xfrm>
             <a:off x="502920" y="6272784"/>
-            <a:ext cx="10088575" cy="402336"/>
+            <a:ext cx="8808415" cy="402336"/>
           </a:xfrm>
           <a:prstGeom prst="rect">
             <a:avLst/>
@@ -11932,7 +11948,7 @@
         <p:spPr>
           <a:xfrm>
             <a:off x="502920" y="6272784"/>
-            <a:ext cx="10088575" cy="402336"/>
+            <a:ext cx="8808415" cy="402336"/>
           </a:xfrm>
           <a:prstGeom prst="rect">
             <a:avLst/>
@@ -12598,9 +12614,93 @@
           </a:graphicData>
         </a:graphic>
       </p:graphicFrame>
+      <p:cxnSp>
+        <p:nvCxnSpPr>
+          <p:cNvPr id="23" name="cpe|exhibit|connector|22"/>
+          <p:cNvCxnSpPr/>
+          <p:nvPr/>
+        </p:nvCxnSpPr>
+        <p:spPr>
+          <a:xfrm>
+            <a:off x="6825062" y="4786729"/>
+            <a:ext cx="2484114" cy="0"/>
+          </a:xfrm>
+          <a:prstGeom prst="line">
+            <a:avLst/>
+          </a:prstGeom>
+          <a:ln w="9525">
+            <a:solidFill>
+              <a:srgbClr val="1E252D"/>
+            </a:solidFill>
+            <a:tailEnd type="triangle" w="med" len="med"/>
+          </a:ln>
+        </p:spPr>
+      </p:cxnSp>
+      <p:cxnSp>
+        <p:nvCxnSpPr>
+          <p:cNvPr id="24" name="cpe|exhibit|connector|23"/>
+          <p:cNvCxnSpPr/>
+          <p:nvPr/>
+        </p:nvCxnSpPr>
+        <p:spPr>
+          <a:xfrm>
+            <a:off x="6825062" y="4786729"/>
+            <a:ext cx="0" cy="91440"/>
+          </a:xfrm>
+          <a:prstGeom prst="line">
+            <a:avLst/>
+          </a:prstGeom>
+          <a:ln w="9525">
+            <a:solidFill>
+              <a:srgbClr val="1E252D"/>
+            </a:solidFill>
+          </a:ln>
+        </p:spPr>
+      </p:cxnSp>
+      <p:sp>
+        <p:nvSpPr>
+          <p:cNvPr id="25" name="cpe|exhibit|label|24"/>
+          <p:cNvSpPr txBox="1"/>
+          <p:nvPr/>
+        </p:nvSpPr>
+        <p:spPr>
+          <a:xfrm>
+            <a:off x="7828525" y="4649569"/>
+            <a:ext cx="477187" cy="274320"/>
+          </a:xfrm>
+          <a:prstGeom prst="rect">
+            <a:avLst/>
+          </a:prstGeom>
+          <a:solidFill>
+            <a:srgbClr val="FFFFFF"/>
+          </a:solidFill>
+        </p:spPr>
+        <p:txBody>
+          <a:bodyPr wrap="square" lIns="0" rIns="0" tIns="0" bIns="0" anchor="ctr">
+            <a:noAutofit/>
+          </a:bodyPr>
+          <a:lstStyle/>
+          <a:p>
+            <a:pPr algn="ctr">
+              <a:lnSpc>
+                <a:spcPct val="100000"/>
+              </a:lnSpc>
+            </a:pPr>
+            <a:r>
+              <a:rPr sz="1000" b="1">
+                <a:solidFill>
+                  <a:srgbClr val="1E252D"/>
+                </a:solidFill>
+                <a:latin typeface="Arial"/>
+              </a:rPr>
+              <a:t>+3%</a:t>
+            </a:r>
+          </a:p>
+        </p:txBody>
+      </p:sp>
       <p:graphicFrame>
         <p:nvGraphicFramePr>
-          <p:cNvPr id="23" name="cpe|exhibit|chart|22"/>
+          <p:cNvPr id="26" name="cpe|exhibit|chart|25"/>
           <p:cNvGraphicFramePr>
             <a:graphicFrameLocks noGrp="1"/>
           </p:cNvGraphicFramePr>
@@ -12618,7 +12718,7 @@
       </p:graphicFrame>
       <p:sp>
         <p:nvSpPr>
-          <p:cNvPr id="24" name="cpe|exhibit|label|23"/>
+          <p:cNvPr id="27" name="cpe|exhibit|label|26"/>
           <p:cNvSpPr txBox="1"/>
           <p:nvPr/>
         </p:nvSpPr>
@@ -12657,7 +12757,7 @@
       </p:sp>
       <p:sp>
         <p:nvSpPr>
-          <p:cNvPr id="25" name="cpe|exhibit|label|24"/>
+          <p:cNvPr id="28" name="cpe|exhibit|label|27"/>
           <p:cNvSpPr txBox="1"/>
           <p:nvPr/>
         </p:nvSpPr>
@@ -12696,7 +12796,7 @@
       </p:sp>
       <p:sp>
         <p:nvSpPr>
-          <p:cNvPr id="26" name="cpe|exhibit|label|25"/>
+          <p:cNvPr id="29" name="cpe|exhibit|label|28"/>
           <p:cNvSpPr txBox="1"/>
           <p:nvPr/>
         </p:nvSpPr>
@@ -12735,7 +12835,7 @@
       </p:sp>
       <p:sp>
         <p:nvSpPr>
-          <p:cNvPr id="27" name="cpe|exhibit|label|26"/>
+          <p:cNvPr id="30" name="cpe|exhibit|label|29"/>
           <p:cNvSpPr txBox="1"/>
           <p:nvPr/>
         </p:nvSpPr>
@@ -12774,7 +12874,7 @@
       </p:sp>
       <p:sp>
         <p:nvSpPr>
-          <p:cNvPr id="28" name="cpe|exhibit|label|27"/>
+          <p:cNvPr id="31" name="cpe|exhibit|label|30"/>
           <p:cNvSpPr txBox="1"/>
           <p:nvPr/>
         </p:nvSpPr>
@@ -12813,7 +12913,7 @@
       </p:sp>
       <p:sp>
         <p:nvSpPr>
-          <p:cNvPr id="29" name="cpe|exhibit|label|28"/>
+          <p:cNvPr id="32" name="cpe|exhibit|label|31"/>
           <p:cNvSpPr txBox="1"/>
           <p:nvPr/>
         </p:nvSpPr>
@@ -12852,7 +12952,7 @@
       </p:sp>
       <p:sp>
         <p:nvSpPr>
-          <p:cNvPr id="30" name="cpe|exhibit|label|29"/>
+          <p:cNvPr id="33" name="cpe|exhibit|label|32"/>
           <p:cNvSpPr txBox="1"/>
           <p:nvPr/>
         </p:nvSpPr>
@@ -12891,7 +12991,7 @@
       </p:sp>
       <p:sp>
         <p:nvSpPr>
-          <p:cNvPr id="31" name="cpe|exhibit|label|30"/>
+          <p:cNvPr id="34" name="cpe|exhibit|label|33"/>
           <p:cNvSpPr txBox="1"/>
           <p:nvPr/>
         </p:nvSpPr>
@@ -12930,7 +13030,7 @@
       </p:sp>
       <p:sp>
         <p:nvSpPr>
-          <p:cNvPr id="32" name="cpe|exhibit|label|31"/>
+          <p:cNvPr id="35" name="cpe|exhibit|label|34"/>
           <p:cNvSpPr txBox="1"/>
           <p:nvPr/>
         </p:nvSpPr>
@@ -12969,7 +13069,7 @@
       </p:sp>
       <p:sp>
         <p:nvSpPr>
-          <p:cNvPr id="33" name="cpe|exhibit|label|32"/>
+          <p:cNvPr id="36" name="cpe|exhibit|label|35"/>
           <p:cNvSpPr txBox="1"/>
           <p:nvPr/>
         </p:nvSpPr>
@@ -13111,7 +13211,7 @@
         <p:spPr>
           <a:xfrm>
             <a:off x="502920" y="6272784"/>
-            <a:ext cx="10088575" cy="402336"/>
+            <a:ext cx="8808415" cy="402336"/>
           </a:xfrm>
           <a:prstGeom prst="rect">
             <a:avLst/>
@@ -14888,7 +14988,7 @@
         <p:spPr>
           <a:xfrm>
             <a:off x="502920" y="6272784"/>
-            <a:ext cx="10088575" cy="402336"/>
+            <a:ext cx="8808415" cy="402336"/>
           </a:xfrm>
           <a:prstGeom prst="rect">
             <a:avLst/>
@@ -15878,7 +15978,7 @@
         <p:spPr>
           <a:xfrm>
             <a:off x="502920" y="6272784"/>
-            <a:ext cx="10088575" cy="402336"/>
+            <a:ext cx="8808415" cy="402336"/>
           </a:xfrm>
           <a:prstGeom prst="rect">
             <a:avLst/>
@@ -18087,7 +18187,7 @@
         <p:spPr>
           <a:xfrm>
             <a:off x="502920" y="6272784"/>
-            <a:ext cx="10088575" cy="402336"/>
+            <a:ext cx="8808415" cy="402336"/>
           </a:xfrm>
           <a:prstGeom prst="rect">
             <a:avLst/>
@@ -18165,7 +18265,7 @@
         <p:spPr>
           <a:xfrm>
             <a:off x="502920" y="1481328"/>
-            <a:ext cx="6441262" cy="274320"/>
+            <a:ext cx="11185855" cy="274320"/>
           </a:xfrm>
           <a:prstGeom prst="rect">
             <a:avLst/>
@@ -18213,7 +18313,7 @@
         <p:spPr>
           <a:xfrm>
             <a:off x="640080" y="2267712"/>
-            <a:ext cx="3106331" cy="1773936"/>
+            <a:ext cx="5478628" cy="1357884"/>
           </a:xfrm>
           <a:prstGeom prst="rect">
             <a:avLst/>
@@ -18241,8 +18341,8 @@
         </p:nvSpPr>
         <p:spPr>
           <a:xfrm>
-            <a:off x="3746411" y="2267712"/>
-            <a:ext cx="3106331" cy="1773936"/>
+            <a:off x="6118708" y="2267712"/>
+            <a:ext cx="5478628" cy="1357884"/>
           </a:xfrm>
           <a:prstGeom prst="rect">
             <a:avLst/>
@@ -18270,8 +18370,8 @@
         </p:nvSpPr>
         <p:spPr>
           <a:xfrm>
-            <a:off x="640080" y="4041648"/>
-            <a:ext cx="3106331" cy="1773936"/>
+            <a:off x="640080" y="3625596"/>
+            <a:ext cx="5478628" cy="1357884"/>
           </a:xfrm>
           <a:prstGeom prst="rect">
             <a:avLst/>
@@ -18301,8 +18401,8 @@
         </p:nvSpPr>
         <p:spPr>
           <a:xfrm>
-            <a:off x="3746411" y="4041648"/>
-            <a:ext cx="3106331" cy="1773936"/>
+            <a:off x="6118708" y="3625596"/>
+            <a:ext cx="5478628" cy="1357884"/>
           </a:xfrm>
           <a:prstGeom prst="rect">
             <a:avLst/>
@@ -18331,7 +18431,7 @@
         <p:spPr>
           <a:xfrm>
             <a:off x="731520" y="2340864"/>
-            <a:ext cx="2923451" cy="237744"/>
+            <a:ext cx="5295748" cy="237744"/>
           </a:xfrm>
           <a:prstGeom prst="rect">
             <a:avLst/>
@@ -18369,8 +18469,8 @@
         </p:nvSpPr>
         <p:spPr>
           <a:xfrm>
-            <a:off x="3837851" y="2340864"/>
-            <a:ext cx="2923451" cy="237744"/>
+            <a:off x="6210148" y="2340864"/>
+            <a:ext cx="5295748" cy="237744"/>
           </a:xfrm>
           <a:prstGeom prst="rect">
             <a:avLst/>
@@ -18408,8 +18508,8 @@
         </p:nvSpPr>
         <p:spPr>
           <a:xfrm>
-            <a:off x="731520" y="5504688"/>
-            <a:ext cx="2923451" cy="237744"/>
+            <a:off x="731520" y="4672584"/>
+            <a:ext cx="5295748" cy="237744"/>
           </a:xfrm>
           <a:prstGeom prst="rect">
             <a:avLst/>
@@ -18447,8 +18547,8 @@
         </p:nvSpPr>
         <p:spPr>
           <a:xfrm>
-            <a:off x="3837851" y="5504688"/>
-            <a:ext cx="2923451" cy="237744"/>
+            <a:off x="6210148" y="4672584"/>
+            <a:ext cx="5295748" cy="237744"/>
           </a:xfrm>
           <a:prstGeom prst="rect">
             <a:avLst/>
@@ -18486,8 +18586,8 @@
         </p:nvCxnSpPr>
         <p:spPr>
           <a:xfrm>
-            <a:off x="640080" y="5815584"/>
-            <a:ext cx="6258382" cy="0"/>
+            <a:off x="640080" y="4983480"/>
+            <a:ext cx="11002975" cy="0"/>
           </a:xfrm>
           <a:prstGeom prst="line">
             <a:avLst/>
@@ -18509,7 +18609,7 @@
         <p:spPr>
           <a:xfrm flipV="1">
             <a:off x="640080" y="2221992"/>
-            <a:ext cx="0" cy="3593592"/>
+            <a:ext cx="0" cy="2761488"/>
           </a:xfrm>
           <a:prstGeom prst="line">
             <a:avLst/>
@@ -18530,8 +18630,8 @@
         </p:nvSpPr>
         <p:spPr>
           <a:xfrm>
-            <a:off x="640080" y="5870448"/>
-            <a:ext cx="6212662" cy="274320"/>
+            <a:off x="640080" y="5038344"/>
+            <a:ext cx="10957255" cy="274320"/>
           </a:xfrm>
           <a:prstGeom prst="rect">
             <a:avLst/>
@@ -18608,8 +18708,8 @@
         </p:nvSpPr>
         <p:spPr>
           <a:xfrm>
-            <a:off x="3959594" y="3296595"/>
-            <a:ext cx="567660" cy="567660"/>
+            <a:off x="6778027" y="3055285"/>
+            <a:ext cx="434523" cy="434523"/>
           </a:xfrm>
           <a:prstGeom prst="ellipse">
             <a:avLst/>
@@ -18639,7 +18739,7 @@
         </p:nvSpPr>
         <p:spPr>
           <a:xfrm>
-            <a:off x="4563830" y="3470697"/>
+            <a:off x="7249125" y="3162818"/>
             <a:ext cx="814217" cy="219456"/>
           </a:xfrm>
           <a:prstGeom prst="rect">
@@ -18678,8 +18778,8 @@
         </p:nvSpPr>
         <p:spPr>
           <a:xfrm>
-            <a:off x="5713789" y="4340127"/>
-            <a:ext cx="538362" cy="538362"/>
+            <a:off x="9857271" y="3854071"/>
+            <a:ext cx="412097" cy="412097"/>
           </a:xfrm>
           <a:prstGeom prst="ellipse">
             <a:avLst/>
@@ -18709,7 +18809,7 @@
         </p:nvSpPr>
         <p:spPr>
           <a:xfrm>
-            <a:off x="4870001" y="4499580"/>
+            <a:off x="10305944" y="3950391"/>
             <a:ext cx="807212" cy="219456"/>
           </a:xfrm>
           <a:prstGeom prst="rect">
@@ -18748,8 +18848,8 @@
         </p:nvSpPr>
         <p:spPr>
           <a:xfrm>
-            <a:off x="2242330" y="2928610"/>
-            <a:ext cx="523098" cy="523098"/>
+            <a:off x="3727050" y="2773605"/>
+            <a:ext cx="400413" cy="400413"/>
           </a:xfrm>
           <a:prstGeom prst="ellipse">
             <a:avLst/>
@@ -18779,7 +18879,7 @@
         </p:nvSpPr>
         <p:spPr>
           <a:xfrm>
-            <a:off x="2802004" y="3080431"/>
+            <a:off x="4164039" y="2864084"/>
             <a:ext cx="821222" cy="219456"/>
           </a:xfrm>
           <a:prstGeom prst="rect">
@@ -18818,8 +18918,8 @@
         </p:nvSpPr>
         <p:spPr>
           <a:xfrm>
-            <a:off x="2877744" y="4007120"/>
-            <a:ext cx="494801" cy="494801"/>
+            <a:off x="4833606" y="3599166"/>
+            <a:ext cx="378753" cy="378753"/>
           </a:xfrm>
           <a:prstGeom prst="ellipse">
             <a:avLst/>
@@ -18849,7 +18949,7 @@
         </p:nvSpPr>
         <p:spPr>
           <a:xfrm>
-            <a:off x="3409122" y="4144792"/>
+            <a:off x="5248934" y="3678814"/>
             <a:ext cx="433118" cy="219456"/>
           </a:xfrm>
           <a:prstGeom prst="rect">
@@ -18888,8 +18988,8 @@
         </p:nvSpPr>
         <p:spPr>
           <a:xfrm>
-            <a:off x="4576111" y="2742003"/>
-            <a:ext cx="328653" cy="328653"/>
+            <a:off x="7746083" y="2630764"/>
+            <a:ext cx="251572" cy="251572"/>
           </a:xfrm>
           <a:prstGeom prst="ellipse">
             <a:avLst/>
@@ -18919,7 +19019,7 @@
         </p:nvSpPr>
         <p:spPr>
           <a:xfrm>
-            <a:off x="4941339" y="2796601"/>
+            <a:off x="8034230" y="2646822"/>
             <a:ext cx="1181346" cy="219456"/>
           </a:xfrm>
           <a:prstGeom prst="rect">
@@ -18958,8 +19058,8 @@
         </p:nvCxnSpPr>
         <p:spPr>
           <a:xfrm>
-            <a:off x="7145350" y="1481328"/>
-            <a:ext cx="0" cy="4718304"/>
+            <a:off x="502920" y="5568696"/>
+            <a:ext cx="11185855" cy="0"/>
           </a:xfrm>
           <a:prstGeom prst="line">
             <a:avLst/>
@@ -18979,8 +19079,8 @@
         </p:nvSpPr>
         <p:spPr>
           <a:xfrm>
-            <a:off x="7373950" y="1481328"/>
-            <a:ext cx="4314825" cy="4718304"/>
+            <a:off x="502920" y="5705856"/>
+            <a:ext cx="3594506" cy="493776"/>
           </a:xfrm>
           <a:prstGeom prst="rect">
             <a:avLst/>
@@ -18993,19 +19093,10 @@
           </a:bodyPr>
           <a:lstStyle/>
           <a:p>
-            <a:pPr algn="l" marL="155448" indent="-155448">
+            <a:pPr algn="l">
               <a:lnSpc>
-                <a:spcPct val="108000"/>
+                <a:spcPct val="100000"/>
               </a:lnSpc>
-              <a:spcAft>
-                <a:spcPts val="800"/>
-              </a:spcAft>
-              <a:buClr>
-                <a:srgbClr val="1E252D"/>
-              </a:buClr>
-              <a:buSzPct val="100000"/>
-              <a:buFont typeface="Arial"/>
-              <a:buChar char="•"/>
             </a:pPr>
             <a:r>
               <a:rPr sz="1200" b="0">
@@ -19035,20 +19126,34 @@
               <a:t> Competitor A on a comparable basket</a:t>
             </a:r>
           </a:p>
-          <a:p>
-            <a:pPr algn="l" marL="155448" indent="-155448">
+        </p:txBody>
+      </p:sp>
+      <p:sp>
+        <p:nvSpPr>
+          <p:cNvPr id="31" name="cpe|commentary|text|30"/>
+          <p:cNvSpPr txBox="1"/>
+          <p:nvPr/>
+        </p:nvSpPr>
+        <p:spPr>
+          <a:xfrm>
+            <a:off x="4298594" y="5705856"/>
+            <a:ext cx="3594506" cy="493776"/>
+          </a:xfrm>
+          <a:prstGeom prst="rect">
+            <a:avLst/>
+          </a:prstGeom>
+          <a:noFill/>
+        </p:spPr>
+        <p:txBody>
+          <a:bodyPr wrap="square" lIns="0" rIns="0" tIns="0" bIns="0" anchor="t">
+            <a:noAutofit/>
+          </a:bodyPr>
+          <a:lstStyle/>
+          <a:p>
+            <a:pPr algn="l">
               <a:lnSpc>
-                <a:spcPct val="108000"/>
+                <a:spcPct val="100000"/>
               </a:lnSpc>
-              <a:spcAft>
-                <a:spcPts val="800"/>
-              </a:spcAft>
-              <a:buClr>
-                <a:srgbClr val="1E252D"/>
-              </a:buClr>
-              <a:buSzPct val="100000"/>
-              <a:buFont typeface="Arial"/>
-              <a:buChar char="•"/>
             </a:pPr>
             <a:r>
               <a:rPr sz="1200" b="0">
@@ -19060,17 +19165,34 @@
               <a:t>Its experience score trails B and C on freshness and queues</a:t>
             </a:r>
           </a:p>
-          <a:p>
-            <a:pPr algn="l" marL="155448" indent="-155448">
+        </p:txBody>
+      </p:sp>
+      <p:sp>
+        <p:nvSpPr>
+          <p:cNvPr id="32" name="cpe|commentary|text|31"/>
+          <p:cNvSpPr txBox="1"/>
+          <p:nvPr/>
+        </p:nvSpPr>
+        <p:spPr>
+          <a:xfrm>
+            <a:off x="8094269" y="5705856"/>
+            <a:ext cx="3594506" cy="493776"/>
+          </a:xfrm>
+          <a:prstGeom prst="rect">
+            <a:avLst/>
+          </a:prstGeom>
+          <a:noFill/>
+        </p:spPr>
+        <p:txBody>
+          <a:bodyPr wrap="square" lIns="0" rIns="0" tIns="0" bIns="0" anchor="t">
+            <a:noAutofit/>
+          </a:bodyPr>
+          <a:lstStyle/>
+          <a:p>
+            <a:pPr algn="l">
               <a:lnSpc>
-                <a:spcPct val="108000"/>
+                <a:spcPct val="100000"/>
               </a:lnSpc>
-              <a:buClr>
-                <a:srgbClr val="1E252D"/>
-              </a:buClr>
-              <a:buSzPct val="100000"/>
-              <a:buFont typeface="Arial"/>
-              <a:buChar char="•"/>
             </a:pPr>
             <a:r>
               <a:rPr sz="1200" b="0">
@@ -19189,7 +19311,7 @@
         <p:spPr>
           <a:xfrm>
             <a:off x="502920" y="6272784"/>
-            <a:ext cx="10088575" cy="402336"/>
+            <a:ext cx="8808415" cy="402336"/>
           </a:xfrm>
           <a:prstGeom prst="rect">
             <a:avLst/>

--- a/examples/alvora/output/1_draft/deck.pptx
+++ b/examples/alvora/output/1_draft/deck.pptx
@@ -6444,7 +6444,7 @@
         <p:spPr>
           <a:xfrm>
             <a:off x="502920" y="475488"/>
-            <a:ext cx="8376964" cy="786384"/>
+            <a:ext cx="11185855" cy="786384"/>
           </a:xfrm>
           <a:prstGeom prst="rect">
             <a:avLst/>
@@ -8269,7 +8269,7 @@
         <p:spPr>
           <a:xfrm>
             <a:off x="502920" y="475488"/>
-            <a:ext cx="6635743" cy="786384"/>
+            <a:ext cx="10527487" cy="786384"/>
           </a:xfrm>
           <a:prstGeom prst="rect">
             <a:avLst/>
@@ -10240,7 +10240,7 @@
         <p:spPr>
           <a:xfrm>
             <a:off x="502920" y="475488"/>
-            <a:ext cx="6382527" cy="786384"/>
+            <a:ext cx="10500055" cy="786384"/>
           </a:xfrm>
           <a:prstGeom prst="rect">
             <a:avLst/>
@@ -11909,7 +11909,7 @@
         <p:spPr>
           <a:xfrm>
             <a:off x="502920" y="475488"/>
-            <a:ext cx="6382527" cy="786384"/>
+            <a:ext cx="10417759" cy="786384"/>
           </a:xfrm>
           <a:prstGeom prst="rect">
             <a:avLst/>
@@ -13172,7 +13172,7 @@
         <p:spPr>
           <a:xfrm>
             <a:off x="502920" y="475488"/>
-            <a:ext cx="6382527" cy="786384"/>
+            <a:ext cx="10472623" cy="786384"/>
           </a:xfrm>
           <a:prstGeom prst="rect">
             <a:avLst/>
@@ -18148,7 +18148,7 @@
         <p:spPr>
           <a:xfrm>
             <a:off x="502920" y="475488"/>
-            <a:ext cx="6382527" cy="786384"/>
+            <a:ext cx="10774375" cy="786384"/>
           </a:xfrm>
           <a:prstGeom prst="rect">
             <a:avLst/>
@@ -19272,7 +19272,7 @@
         <p:spPr>
           <a:xfrm>
             <a:off x="502920" y="475488"/>
-            <a:ext cx="6382527" cy="786384"/>
+            <a:ext cx="10445191" cy="786384"/>
           </a:xfrm>
           <a:prstGeom prst="rect">
             <a:avLst/>

--- a/examples/alvora/output/1_draft/deck.pptx
+++ b/examples/alvora/output/1_draft/deck.pptx
@@ -18265,7 +18265,7 @@
         <p:spPr>
           <a:xfrm>
             <a:off x="502920" y="1481328"/>
-            <a:ext cx="11185855" cy="274320"/>
+            <a:ext cx="6441262" cy="274320"/>
           </a:xfrm>
           <a:prstGeom prst="rect">
             <a:avLst/>
@@ -18313,7 +18313,7 @@
         <p:spPr>
           <a:xfrm>
             <a:off x="640080" y="2267712"/>
-            <a:ext cx="5478628" cy="1357884"/>
+            <a:ext cx="3106331" cy="1773936"/>
           </a:xfrm>
           <a:prstGeom prst="rect">
             <a:avLst/>
@@ -18341,8 +18341,8 @@
         </p:nvSpPr>
         <p:spPr>
           <a:xfrm>
-            <a:off x="6118708" y="2267712"/>
-            <a:ext cx="5478628" cy="1357884"/>
+            <a:off x="3746411" y="2267712"/>
+            <a:ext cx="3106331" cy="1773936"/>
           </a:xfrm>
           <a:prstGeom prst="rect">
             <a:avLst/>
@@ -18370,8 +18370,8 @@
         </p:nvSpPr>
         <p:spPr>
           <a:xfrm>
-            <a:off x="640080" y="3625596"/>
-            <a:ext cx="5478628" cy="1357884"/>
+            <a:off x="640080" y="4041648"/>
+            <a:ext cx="3106331" cy="1773936"/>
           </a:xfrm>
           <a:prstGeom prst="rect">
             <a:avLst/>
@@ -18401,8 +18401,8 @@
         </p:nvSpPr>
         <p:spPr>
           <a:xfrm>
-            <a:off x="6118708" y="3625596"/>
-            <a:ext cx="5478628" cy="1357884"/>
+            <a:off x="3746411" y="4041648"/>
+            <a:ext cx="3106331" cy="1773936"/>
           </a:xfrm>
           <a:prstGeom prst="rect">
             <a:avLst/>
@@ -18431,7 +18431,7 @@
         <p:spPr>
           <a:xfrm>
             <a:off x="731520" y="2340864"/>
-            <a:ext cx="5295748" cy="237744"/>
+            <a:ext cx="2923451" cy="237744"/>
           </a:xfrm>
           <a:prstGeom prst="rect">
             <a:avLst/>
@@ -18469,8 +18469,8 @@
         </p:nvSpPr>
         <p:spPr>
           <a:xfrm>
-            <a:off x="6210148" y="2340864"/>
-            <a:ext cx="5295748" cy="237744"/>
+            <a:off x="3837851" y="2340864"/>
+            <a:ext cx="2923451" cy="237744"/>
           </a:xfrm>
           <a:prstGeom prst="rect">
             <a:avLst/>
@@ -18508,8 +18508,8 @@
         </p:nvSpPr>
         <p:spPr>
           <a:xfrm>
-            <a:off x="731520" y="4672584"/>
-            <a:ext cx="5295748" cy="237744"/>
+            <a:off x="731520" y="5504688"/>
+            <a:ext cx="2923451" cy="237744"/>
           </a:xfrm>
           <a:prstGeom prst="rect">
             <a:avLst/>
@@ -18547,8 +18547,8 @@
         </p:nvSpPr>
         <p:spPr>
           <a:xfrm>
-            <a:off x="6210148" y="4672584"/>
-            <a:ext cx="5295748" cy="237744"/>
+            <a:off x="3837851" y="5504688"/>
+            <a:ext cx="2923451" cy="237744"/>
           </a:xfrm>
           <a:prstGeom prst="rect">
             <a:avLst/>
@@ -18586,8 +18586,8 @@
         </p:nvCxnSpPr>
         <p:spPr>
           <a:xfrm>
-            <a:off x="640080" y="4983480"/>
-            <a:ext cx="11002975" cy="0"/>
+            <a:off x="640080" y="5815584"/>
+            <a:ext cx="6258382" cy="0"/>
           </a:xfrm>
           <a:prstGeom prst="line">
             <a:avLst/>
@@ -18609,7 +18609,7 @@
         <p:spPr>
           <a:xfrm flipV="1">
             <a:off x="640080" y="2221992"/>
-            <a:ext cx="0" cy="2761488"/>
+            <a:ext cx="0" cy="3593592"/>
           </a:xfrm>
           <a:prstGeom prst="line">
             <a:avLst/>
@@ -18630,8 +18630,8 @@
         </p:nvSpPr>
         <p:spPr>
           <a:xfrm>
-            <a:off x="640080" y="5038344"/>
-            <a:ext cx="10957255" cy="274320"/>
+            <a:off x="640080" y="5870448"/>
+            <a:ext cx="6212662" cy="274320"/>
           </a:xfrm>
           <a:prstGeom prst="rect">
             <a:avLst/>
@@ -18708,8 +18708,8 @@
         </p:nvSpPr>
         <p:spPr>
           <a:xfrm>
-            <a:off x="6778027" y="3055285"/>
-            <a:ext cx="434523" cy="434523"/>
+            <a:off x="3959594" y="3296595"/>
+            <a:ext cx="567660" cy="567660"/>
           </a:xfrm>
           <a:prstGeom prst="ellipse">
             <a:avLst/>
@@ -18739,7 +18739,7 @@
         </p:nvSpPr>
         <p:spPr>
           <a:xfrm>
-            <a:off x="7249125" y="3162818"/>
+            <a:off x="4563830" y="3470697"/>
             <a:ext cx="814217" cy="219456"/>
           </a:xfrm>
           <a:prstGeom prst="rect">
@@ -18778,8 +18778,8 @@
         </p:nvSpPr>
         <p:spPr>
           <a:xfrm>
-            <a:off x="9857271" y="3854071"/>
-            <a:ext cx="412097" cy="412097"/>
+            <a:off x="5713789" y="4340127"/>
+            <a:ext cx="538362" cy="538362"/>
           </a:xfrm>
           <a:prstGeom prst="ellipse">
             <a:avLst/>
@@ -18809,7 +18809,7 @@
         </p:nvSpPr>
         <p:spPr>
           <a:xfrm>
-            <a:off x="10305944" y="3950391"/>
+            <a:off x="4870001" y="4499580"/>
             <a:ext cx="807212" cy="219456"/>
           </a:xfrm>
           <a:prstGeom prst="rect">
@@ -18848,8 +18848,8 @@
         </p:nvSpPr>
         <p:spPr>
           <a:xfrm>
-            <a:off x="3727050" y="2773605"/>
-            <a:ext cx="400413" cy="400413"/>
+            <a:off x="2242330" y="2928610"/>
+            <a:ext cx="523098" cy="523098"/>
           </a:xfrm>
           <a:prstGeom prst="ellipse">
             <a:avLst/>
@@ -18879,7 +18879,7 @@
         </p:nvSpPr>
         <p:spPr>
           <a:xfrm>
-            <a:off x="4164039" y="2864084"/>
+            <a:off x="2802004" y="3080431"/>
             <a:ext cx="821222" cy="219456"/>
           </a:xfrm>
           <a:prstGeom prst="rect">
@@ -18918,8 +18918,8 @@
         </p:nvSpPr>
         <p:spPr>
           <a:xfrm>
-            <a:off x="4833606" y="3599166"/>
-            <a:ext cx="378753" cy="378753"/>
+            <a:off x="2877744" y="4007120"/>
+            <a:ext cx="494801" cy="494801"/>
           </a:xfrm>
           <a:prstGeom prst="ellipse">
             <a:avLst/>
@@ -18949,7 +18949,7 @@
         </p:nvSpPr>
         <p:spPr>
           <a:xfrm>
-            <a:off x="5248934" y="3678814"/>
+            <a:off x="3409122" y="4144792"/>
             <a:ext cx="433118" cy="219456"/>
           </a:xfrm>
           <a:prstGeom prst="rect">
@@ -18988,8 +18988,8 @@
         </p:nvSpPr>
         <p:spPr>
           <a:xfrm>
-            <a:off x="7746083" y="2630764"/>
-            <a:ext cx="251572" cy="251572"/>
+            <a:off x="4576111" y="2742003"/>
+            <a:ext cx="328653" cy="328653"/>
           </a:xfrm>
           <a:prstGeom prst="ellipse">
             <a:avLst/>
@@ -19019,7 +19019,7 @@
         </p:nvSpPr>
         <p:spPr>
           <a:xfrm>
-            <a:off x="8034230" y="2646822"/>
+            <a:off x="4941339" y="2796601"/>
             <a:ext cx="1181346" cy="219456"/>
           </a:xfrm>
           <a:prstGeom prst="rect">
@@ -19058,8 +19058,8 @@
         </p:nvCxnSpPr>
         <p:spPr>
           <a:xfrm>
-            <a:off x="502920" y="5568696"/>
-            <a:ext cx="11185855" cy="0"/>
+            <a:off x="7145350" y="1481328"/>
+            <a:ext cx="0" cy="4718304"/>
           </a:xfrm>
           <a:prstGeom prst="line">
             <a:avLst/>
@@ -19079,8 +19079,8 @@
         </p:nvSpPr>
         <p:spPr>
           <a:xfrm>
-            <a:off x="502920" y="5705856"/>
-            <a:ext cx="3594506" cy="493776"/>
+            <a:off x="7373950" y="1481328"/>
+            <a:ext cx="4314825" cy="4718304"/>
           </a:xfrm>
           <a:prstGeom prst="rect">
             <a:avLst/>
@@ -19093,10 +19093,19 @@
           </a:bodyPr>
           <a:lstStyle/>
           <a:p>
-            <a:pPr algn="l">
+            <a:pPr algn="l" marL="155448" indent="-155448">
               <a:lnSpc>
-                <a:spcPct val="100000"/>
+                <a:spcPct val="108000"/>
               </a:lnSpc>
+              <a:spcAft>
+                <a:spcPts val="800"/>
+              </a:spcAft>
+              <a:buClr>
+                <a:srgbClr val="1E252D"/>
+              </a:buClr>
+              <a:buSzPct val="100000"/>
+              <a:buFont typeface="Arial"/>
+              <a:buChar char="•"/>
             </a:pPr>
             <a:r>
               <a:rPr sz="1200" b="0">
@@ -19126,34 +19135,20 @@
               <a:t> Competitor A on a comparable basket</a:t>
             </a:r>
           </a:p>
-        </p:txBody>
-      </p:sp>
-      <p:sp>
-        <p:nvSpPr>
-          <p:cNvPr id="31" name="cpe|commentary|text|30"/>
-          <p:cNvSpPr txBox="1"/>
-          <p:nvPr/>
-        </p:nvSpPr>
-        <p:spPr>
-          <a:xfrm>
-            <a:off x="4298594" y="5705856"/>
-            <a:ext cx="3594506" cy="493776"/>
-          </a:xfrm>
-          <a:prstGeom prst="rect">
-            <a:avLst/>
-          </a:prstGeom>
-          <a:noFill/>
-        </p:spPr>
-        <p:txBody>
-          <a:bodyPr wrap="square" lIns="0" rIns="0" tIns="0" bIns="0" anchor="t">
-            <a:noAutofit/>
-          </a:bodyPr>
-          <a:lstStyle/>
-          <a:p>
-            <a:pPr algn="l">
+          <a:p>
+            <a:pPr algn="l" marL="155448" indent="-155448">
               <a:lnSpc>
-                <a:spcPct val="100000"/>
+                <a:spcPct val="108000"/>
               </a:lnSpc>
+              <a:spcAft>
+                <a:spcPts val="800"/>
+              </a:spcAft>
+              <a:buClr>
+                <a:srgbClr val="1E252D"/>
+              </a:buClr>
+              <a:buSzPct val="100000"/>
+              <a:buFont typeface="Arial"/>
+              <a:buChar char="•"/>
             </a:pPr>
             <a:r>
               <a:rPr sz="1200" b="0">
@@ -19165,34 +19160,17 @@
               <a:t>Its experience score trails B and C on freshness and queues</a:t>
             </a:r>
           </a:p>
-        </p:txBody>
-      </p:sp>
-      <p:sp>
-        <p:nvSpPr>
-          <p:cNvPr id="32" name="cpe|commentary|text|31"/>
-          <p:cNvSpPr txBox="1"/>
-          <p:nvPr/>
-        </p:nvSpPr>
-        <p:spPr>
-          <a:xfrm>
-            <a:off x="8094269" y="5705856"/>
-            <a:ext cx="3594506" cy="493776"/>
-          </a:xfrm>
-          <a:prstGeom prst="rect">
-            <a:avLst/>
-          </a:prstGeom>
-          <a:noFill/>
-        </p:spPr>
-        <p:txBody>
-          <a:bodyPr wrap="square" lIns="0" rIns="0" tIns="0" bIns="0" anchor="t">
-            <a:noAutofit/>
-          </a:bodyPr>
-          <a:lstStyle/>
-          <a:p>
-            <a:pPr algn="l">
+          <a:p>
+            <a:pPr algn="l" marL="155448" indent="-155448">
               <a:lnSpc>
-                <a:spcPct val="100000"/>
+                <a:spcPct val="108000"/>
               </a:lnSpc>
+              <a:buClr>
+                <a:srgbClr val="1E252D"/>
+              </a:buClr>
+              <a:buSzPct val="100000"/>
+              <a:buFont typeface="Arial"/>
+              <a:buChar char="•"/>
             </a:pPr>
             <a:r>
               <a:rPr sz="1200" b="0">

--- a/examples/alvora/output/1_draft/deck.pptx
+++ b/examples/alvora/output/1_draft/deck.pptx
@@ -10357,7 +10357,7 @@
         <p:spPr>
           <a:xfrm>
             <a:off x="502920" y="1517904"/>
-            <a:ext cx="411480" cy="411480"/>
+            <a:ext cx="411480" cy="1003554"/>
           </a:xfrm>
           <a:prstGeom prst="rect">
             <a:avLst/>
@@ -10365,7 +10365,7 @@
           <a:noFill/>
         </p:spPr>
         <p:txBody>
-          <a:bodyPr wrap="square" lIns="0" rIns="0" tIns="0" bIns="0" anchor="t">
+          <a:bodyPr wrap="square" lIns="0" rIns="0" tIns="0" bIns="0" anchor="ctr">
             <a:noAutofit/>
           </a:bodyPr>
           <a:lstStyle/>
@@ -10404,7 +10404,7 @@
           <a:noFill/>
         </p:spPr>
         <p:txBody>
-          <a:bodyPr wrap="square" lIns="0" rIns="0" tIns="0" bIns="0" anchor="t">
+          <a:bodyPr wrap="square" lIns="0" rIns="0" tIns="0" bIns="0" anchor="ctr">
             <a:noAutofit/>
           </a:bodyPr>
           <a:lstStyle/>
@@ -10443,7 +10443,7 @@
           <a:noFill/>
         </p:spPr>
         <p:txBody>
-          <a:bodyPr wrap="square" lIns="0" rIns="0" tIns="0" bIns="0" anchor="t">
+          <a:bodyPr wrap="square" lIns="0" rIns="0" tIns="0" bIns="0" anchor="ctr">
             <a:noAutofit/>
           </a:bodyPr>
           <a:lstStyle/>
@@ -10495,7 +10495,7 @@
         <p:spPr>
           <a:xfrm>
             <a:off x="502920" y="2731770"/>
-            <a:ext cx="411480" cy="411480"/>
+            <a:ext cx="411480" cy="1003554"/>
           </a:xfrm>
           <a:prstGeom prst="rect">
             <a:avLst/>
@@ -10503,7 +10503,7 @@
           <a:noFill/>
         </p:spPr>
         <p:txBody>
-          <a:bodyPr wrap="square" lIns="0" rIns="0" tIns="0" bIns="0" anchor="t">
+          <a:bodyPr wrap="square" lIns="0" rIns="0" tIns="0" bIns="0" anchor="ctr">
             <a:noAutofit/>
           </a:bodyPr>
           <a:lstStyle/>
@@ -10542,7 +10542,7 @@
           <a:noFill/>
         </p:spPr>
         <p:txBody>
-          <a:bodyPr wrap="square" lIns="0" rIns="0" tIns="0" bIns="0" anchor="t">
+          <a:bodyPr wrap="square" lIns="0" rIns="0" tIns="0" bIns="0" anchor="ctr">
             <a:noAutofit/>
           </a:bodyPr>
           <a:lstStyle/>
@@ -10581,7 +10581,7 @@
           <a:noFill/>
         </p:spPr>
         <p:txBody>
-          <a:bodyPr wrap="square" lIns="0" rIns="0" tIns="0" bIns="0" anchor="t">
+          <a:bodyPr wrap="square" lIns="0" rIns="0" tIns="0" bIns="0" anchor="ctr">
             <a:noAutofit/>
           </a:bodyPr>
           <a:lstStyle/>
@@ -10633,7 +10633,7 @@
         <p:spPr>
           <a:xfrm>
             <a:off x="502920" y="3945636"/>
-            <a:ext cx="411480" cy="411480"/>
+            <a:ext cx="411480" cy="1003554"/>
           </a:xfrm>
           <a:prstGeom prst="rect">
             <a:avLst/>
@@ -10641,7 +10641,7 @@
           <a:noFill/>
         </p:spPr>
         <p:txBody>
-          <a:bodyPr wrap="square" lIns="0" rIns="0" tIns="0" bIns="0" anchor="t">
+          <a:bodyPr wrap="square" lIns="0" rIns="0" tIns="0" bIns="0" anchor="ctr">
             <a:noAutofit/>
           </a:bodyPr>
           <a:lstStyle/>
@@ -10680,7 +10680,7 @@
           <a:noFill/>
         </p:spPr>
         <p:txBody>
-          <a:bodyPr wrap="square" lIns="0" rIns="0" tIns="0" bIns="0" anchor="t">
+          <a:bodyPr wrap="square" lIns="0" rIns="0" tIns="0" bIns="0" anchor="ctr">
             <a:noAutofit/>
           </a:bodyPr>
           <a:lstStyle/>
@@ -10719,7 +10719,7 @@
           <a:noFill/>
         </p:spPr>
         <p:txBody>
-          <a:bodyPr wrap="square" lIns="0" rIns="0" tIns="0" bIns="0" anchor="t">
+          <a:bodyPr wrap="square" lIns="0" rIns="0" tIns="0" bIns="0" anchor="ctr">
             <a:noAutofit/>
           </a:bodyPr>
           <a:lstStyle/>
@@ -10771,7 +10771,7 @@
         <p:spPr>
           <a:xfrm>
             <a:off x="502920" y="5159502"/>
-            <a:ext cx="411480" cy="411480"/>
+            <a:ext cx="411480" cy="1003554"/>
           </a:xfrm>
           <a:prstGeom prst="rect">
             <a:avLst/>
@@ -10779,7 +10779,7 @@
           <a:noFill/>
         </p:spPr>
         <p:txBody>
-          <a:bodyPr wrap="square" lIns="0" rIns="0" tIns="0" bIns="0" anchor="t">
+          <a:bodyPr wrap="square" lIns="0" rIns="0" tIns="0" bIns="0" anchor="ctr">
             <a:noAutofit/>
           </a:bodyPr>
           <a:lstStyle/>
@@ -10818,7 +10818,7 @@
           <a:noFill/>
         </p:spPr>
         <p:txBody>
-          <a:bodyPr wrap="square" lIns="0" rIns="0" tIns="0" bIns="0" anchor="t">
+          <a:bodyPr wrap="square" lIns="0" rIns="0" tIns="0" bIns="0" anchor="ctr">
             <a:noAutofit/>
           </a:bodyPr>
           <a:lstStyle/>
@@ -10857,7 +10857,7 @@
           <a:noFill/>
         </p:spPr>
         <p:txBody>
-          <a:bodyPr wrap="square" lIns="0" rIns="0" tIns="0" bIns="0" anchor="t">
+          <a:bodyPr wrap="square" lIns="0" rIns="0" tIns="0" bIns="0" anchor="ctr">
             <a:noAutofit/>
           </a:bodyPr>
           <a:lstStyle/>

--- a/examples/alvora/output/1_draft/deck.pptx
+++ b/examples/alvora/output/1_draft/deck.pptx
@@ -6240,7 +6240,7 @@
         </p:nvSpPr>
         <p:spPr>
           <a:xfrm>
-            <a:off x="502920" y="2148840"/>
+            <a:off x="502920" y="2384984"/>
             <a:ext cx="822960" cy="64008"/>
           </a:xfrm>
           <a:prstGeom prst="rect">
@@ -6269,8 +6269,8 @@
         </p:nvSpPr>
         <p:spPr>
           <a:xfrm>
-            <a:off x="502920" y="2377440"/>
-            <a:ext cx="9288018" cy="1737360"/>
+            <a:off x="502920" y="2677592"/>
+            <a:ext cx="9288018" cy="626364"/>
           </a:xfrm>
           <a:prstGeom prst="rect">
             <a:avLst/>
@@ -6308,8 +6308,8 @@
         </p:nvSpPr>
         <p:spPr>
           <a:xfrm>
-            <a:off x="502920" y="4160520"/>
-            <a:ext cx="8339099" cy="822960"/>
+            <a:off x="502920" y="3505124"/>
+            <a:ext cx="8339099" cy="329184"/>
           </a:xfrm>
           <a:prstGeom prst="rect">
             <a:avLst/>
@@ -6341,13 +6341,42 @@
       </p:sp>
       <p:sp>
         <p:nvSpPr>
-          <p:cNvPr id="5" name="cpe|text|text|4"/>
+          <p:cNvPr id="5" name="cpe|text|bleed|4"/>
+          <p:cNvSpPr/>
+          <p:nvPr/>
+        </p:nvSpPr>
+        <p:spPr>
+          <a:xfrm>
+            <a:off x="0" y="5486400"/>
+            <a:ext cx="12191695" cy="1371600"/>
+          </a:xfrm>
+          <a:prstGeom prst="rect">
+            <a:avLst/>
+          </a:prstGeom>
+          <a:solidFill>
+            <a:srgbClr val="0B1F3A"/>
+          </a:solidFill>
+          <a:ln>
+            <a:noFill/>
+          </a:ln>
+        </p:spPr>
+        <p:txBody>
+          <a:bodyPr rtlCol="0" anchor="ctr" lIns="0" rIns="0" tIns="0" bIns="0"/>
+          <a:lstStyle/>
+          <a:p>
+            <a:pPr algn="ctr"/>
+          </a:p>
+        </p:txBody>
+      </p:sp>
+      <p:sp>
+        <p:nvSpPr>
+          <p:cNvPr id="6" name="cpe|text|text|5"/>
           <p:cNvSpPr txBox="1"/>
           <p:nvPr/>
         </p:nvSpPr>
         <p:spPr>
           <a:xfrm>
-            <a:off x="502920" y="5989320"/>
+            <a:off x="502920" y="6012180"/>
             <a:ext cx="8339099" cy="320040"/>
           </a:xfrm>
           <a:prstGeom prst="rect">
@@ -6356,7 +6385,7 @@
           <a:noFill/>
         </p:spPr>
         <p:txBody>
-          <a:bodyPr wrap="square" lIns="0" rIns="0" tIns="0" bIns="0" anchor="t">
+          <a:bodyPr wrap="square" lIns="0" rIns="0" tIns="0" bIns="0" anchor="ctr">
             <a:noAutofit/>
           </a:bodyPr>
           <a:lstStyle/>
@@ -6367,9 +6396,9 @@
               </a:lnSpc>
             </a:pPr>
             <a:r>
-              <a:rPr sz="1000" b="0">
-                <a:solidFill>
-                  <a:srgbClr val="5E6A77"/>
+              <a:rPr sz="1100" b="0">
+                <a:solidFill>
+                  <a:srgbClr val="FFFFFF"/>
                 </a:solidFill>
                 <a:latin typeface="Arial"/>
               </a:rPr>

--- a/examples/alvora/output/1_draft/deck.pptx
+++ b/examples/alvora/output/1_draft/deck.pptx
@@ -7127,7 +7127,7 @@
         <p:spPr>
           <a:xfrm>
             <a:off x="4341457" y="2121408"/>
-            <a:ext cx="0" cy="3401568"/>
+            <a:ext cx="0" cy="3840480"/>
           </a:xfrm>
           <a:prstGeom prst="line">
             <a:avLst/>
@@ -7148,7 +7148,7 @@
         <p:spPr>
           <a:xfrm>
             <a:off x="5391074" y="2121408"/>
-            <a:ext cx="0" cy="3401568"/>
+            <a:ext cx="0" cy="3840480"/>
           </a:xfrm>
           <a:prstGeom prst="line">
             <a:avLst/>
@@ -7169,7 +7169,7 @@
         <p:spPr>
           <a:xfrm>
             <a:off x="6440691" y="2121408"/>
-            <a:ext cx="0" cy="3401568"/>
+            <a:ext cx="0" cy="3840480"/>
           </a:xfrm>
           <a:prstGeom prst="line">
             <a:avLst/>
@@ -7190,7 +7190,7 @@
         <p:spPr>
           <a:xfrm>
             <a:off x="7490308" y="2121408"/>
-            <a:ext cx="0" cy="3401568"/>
+            <a:ext cx="0" cy="3840480"/>
           </a:xfrm>
           <a:prstGeom prst="line">
             <a:avLst/>
@@ -7211,7 +7211,7 @@
         <p:spPr>
           <a:xfrm>
             <a:off x="8539924" y="2121408"/>
-            <a:ext cx="0" cy="3401568"/>
+            <a:ext cx="0" cy="3840480"/>
           </a:xfrm>
           <a:prstGeom prst="line">
             <a:avLst/>
@@ -7232,7 +7232,7 @@
         <p:spPr>
           <a:xfrm>
             <a:off x="9589541" y="2121408"/>
-            <a:ext cx="0" cy="3401568"/>
+            <a:ext cx="0" cy="3840480"/>
           </a:xfrm>
           <a:prstGeom prst="line">
             <a:avLst/>
@@ -7253,7 +7253,7 @@
         <p:spPr>
           <a:xfrm>
             <a:off x="10639158" y="2121408"/>
-            <a:ext cx="0" cy="3401568"/>
+            <a:ext cx="0" cy="3840480"/>
           </a:xfrm>
           <a:prstGeom prst="line">
             <a:avLst/>
@@ -7274,7 +7274,7 @@
         <p:spPr>
           <a:xfrm>
             <a:off x="3816648" y="2075688"/>
-            <a:ext cx="0" cy="3447288"/>
+            <a:ext cx="0" cy="3886200"/>
           </a:xfrm>
           <a:prstGeom prst="line">
             <a:avLst/>
@@ -7295,7 +7295,7 @@
         </p:nvSpPr>
         <p:spPr>
           <a:xfrm>
-            <a:off x="3359448" y="5541264"/>
+            <a:off x="3359448" y="5980176"/>
             <a:ext cx="914400" cy="201168"/>
           </a:xfrm>
           <a:prstGeom prst="rect">
@@ -7335,7 +7335,7 @@
         <p:spPr>
           <a:xfrm>
             <a:off x="502920" y="2121408"/>
-            <a:ext cx="2651760" cy="566928"/>
+            <a:ext cx="2651760" cy="640080"/>
           </a:xfrm>
           <a:prstGeom prst="rect">
             <a:avLst/>
@@ -7373,8 +7373,8 @@
         </p:nvSpPr>
         <p:spPr>
           <a:xfrm>
-            <a:off x="3319272" y="2257471"/>
-            <a:ext cx="3093987" cy="294803"/>
+            <a:off x="3319272" y="2275027"/>
+            <a:ext cx="3093987" cy="332842"/>
           </a:xfrm>
           <a:prstGeom prst="rect">
             <a:avLst/>
@@ -7402,8 +7402,8 @@
         </p:nvSpPr>
         <p:spPr>
           <a:xfrm>
-            <a:off x="3374136" y="2257471"/>
-            <a:ext cx="2984259" cy="294803"/>
+            <a:off x="3374136" y="2275027"/>
+            <a:ext cx="2984259" cy="332842"/>
           </a:xfrm>
           <a:prstGeom prst="rect">
             <a:avLst/>
@@ -7441,7 +7441,7 @@
         </p:nvCxnSpPr>
         <p:spPr>
           <a:xfrm>
-            <a:off x="502920" y="2688336"/>
+            <a:off x="502920" y="2761488"/>
             <a:ext cx="11185855" cy="0"/>
           </a:xfrm>
           <a:prstGeom prst="line">
@@ -7462,8 +7462,8 @@
         </p:nvSpPr>
         <p:spPr>
           <a:xfrm>
-            <a:off x="502920" y="2688336"/>
-            <a:ext cx="2651760" cy="566928"/>
+            <a:off x="502920" y="2761488"/>
+            <a:ext cx="2651760" cy="640080"/>
           </a:xfrm>
           <a:prstGeom prst="rect">
             <a:avLst/>
@@ -7501,8 +7501,8 @@
         </p:nvSpPr>
         <p:spPr>
           <a:xfrm>
-            <a:off x="3319272" y="2824399"/>
-            <a:ext cx="4143604" cy="294803"/>
+            <a:off x="3319272" y="2915107"/>
+            <a:ext cx="4143604" cy="332842"/>
           </a:xfrm>
           <a:prstGeom prst="rect">
             <a:avLst/>
@@ -7530,8 +7530,8 @@
         </p:nvSpPr>
         <p:spPr>
           <a:xfrm>
-            <a:off x="3374136" y="2824399"/>
-            <a:ext cx="4033876" cy="294803"/>
+            <a:off x="3374136" y="2915107"/>
+            <a:ext cx="4033876" cy="332842"/>
           </a:xfrm>
           <a:prstGeom prst="rect">
             <a:avLst/>
@@ -7569,7 +7569,7 @@
         </p:nvCxnSpPr>
         <p:spPr>
           <a:xfrm>
-            <a:off x="502920" y="3255264"/>
+            <a:off x="502920" y="3401568"/>
             <a:ext cx="11185855" cy="0"/>
           </a:xfrm>
           <a:prstGeom prst="line">
@@ -7590,8 +7590,8 @@
         </p:nvSpPr>
         <p:spPr>
           <a:xfrm>
-            <a:off x="502920" y="3255264"/>
-            <a:ext cx="2651760" cy="566928"/>
+            <a:off x="502920" y="3401568"/>
+            <a:ext cx="2651760" cy="640080"/>
           </a:xfrm>
           <a:prstGeom prst="rect">
             <a:avLst/>
@@ -7629,8 +7629,8 @@
         </p:nvSpPr>
         <p:spPr>
           <a:xfrm>
-            <a:off x="4368889" y="3391327"/>
-            <a:ext cx="6242837" cy="294803"/>
+            <a:off x="4368889" y="3555187"/>
+            <a:ext cx="6242837" cy="332842"/>
           </a:xfrm>
           <a:prstGeom prst="rect">
             <a:avLst/>
@@ -7658,8 +7658,8 @@
         </p:nvSpPr>
         <p:spPr>
           <a:xfrm>
-            <a:off x="4423753" y="3391327"/>
-            <a:ext cx="6133109" cy="294803"/>
+            <a:off x="4423753" y="3555187"/>
+            <a:ext cx="6133109" cy="332842"/>
           </a:xfrm>
           <a:prstGeom prst="rect">
             <a:avLst/>
@@ -7697,7 +7697,7 @@
         </p:nvCxnSpPr>
         <p:spPr>
           <a:xfrm>
-            <a:off x="502920" y="3822192"/>
+            <a:off x="502920" y="4041648"/>
             <a:ext cx="11185855" cy="0"/>
           </a:xfrm>
           <a:prstGeom prst="line">
@@ -7718,8 +7718,8 @@
         </p:nvSpPr>
         <p:spPr>
           <a:xfrm>
-            <a:off x="502920" y="3822192"/>
-            <a:ext cx="2651760" cy="566928"/>
+            <a:off x="502920" y="4041648"/>
+            <a:ext cx="2651760" cy="640080"/>
           </a:xfrm>
           <a:prstGeom prst="rect">
             <a:avLst/>
@@ -7757,8 +7757,8 @@
         </p:nvSpPr>
         <p:spPr>
           <a:xfrm>
-            <a:off x="5418506" y="3958255"/>
-            <a:ext cx="6242837" cy="294803"/>
+            <a:off x="5418506" y="4195267"/>
+            <a:ext cx="6242837" cy="332842"/>
           </a:xfrm>
           <a:prstGeom prst="rect">
             <a:avLst/>
@@ -7786,8 +7786,8 @@
         </p:nvSpPr>
         <p:spPr>
           <a:xfrm>
-            <a:off x="5473370" y="3958255"/>
-            <a:ext cx="6133109" cy="294803"/>
+            <a:off x="5473370" y="4195267"/>
+            <a:ext cx="6133109" cy="332842"/>
           </a:xfrm>
           <a:prstGeom prst="rect">
             <a:avLst/>
@@ -7825,7 +7825,7 @@
         </p:nvCxnSpPr>
         <p:spPr>
           <a:xfrm>
-            <a:off x="502920" y="4389120"/>
+            <a:off x="502920" y="4681728"/>
             <a:ext cx="11185855" cy="0"/>
           </a:xfrm>
           <a:prstGeom prst="line">
@@ -7846,8 +7846,8 @@
         </p:nvSpPr>
         <p:spPr>
           <a:xfrm>
-            <a:off x="502920" y="4389120"/>
-            <a:ext cx="2651760" cy="566928"/>
+            <a:off x="502920" y="4681728"/>
+            <a:ext cx="2651760" cy="640080"/>
           </a:xfrm>
           <a:prstGeom prst="rect">
             <a:avLst/>
@@ -7885,8 +7885,8 @@
         </p:nvSpPr>
         <p:spPr>
           <a:xfrm>
-            <a:off x="6468123" y="4604553"/>
-            <a:ext cx="2044370" cy="294803"/>
+            <a:off x="6468123" y="4924958"/>
+            <a:ext cx="2044370" cy="332842"/>
           </a:xfrm>
           <a:prstGeom prst="rect">
             <a:avLst/>
@@ -7914,8 +7914,8 @@
         </p:nvSpPr>
         <p:spPr>
           <a:xfrm>
-            <a:off x="6522987" y="4604553"/>
-            <a:ext cx="1934642" cy="294803"/>
+            <a:off x="6522987" y="4924958"/>
+            <a:ext cx="1934642" cy="332842"/>
           </a:xfrm>
           <a:prstGeom prst="rect">
             <a:avLst/>
@@ -7953,8 +7953,8 @@
         </p:nvSpPr>
         <p:spPr>
           <a:xfrm>
-            <a:off x="8567356" y="4604553"/>
-            <a:ext cx="3093987" cy="294803"/>
+            <a:off x="8567356" y="4924958"/>
+            <a:ext cx="3093987" cy="332842"/>
           </a:xfrm>
           <a:prstGeom prst="rect">
             <a:avLst/>
@@ -7982,8 +7982,8 @@
         </p:nvSpPr>
         <p:spPr>
           <a:xfrm>
-            <a:off x="8750236" y="4604553"/>
-            <a:ext cx="2856243" cy="294803"/>
+            <a:off x="8750236" y="4924958"/>
+            <a:ext cx="2856243" cy="332842"/>
           </a:xfrm>
           <a:prstGeom prst="rect">
             <a:avLst/>
@@ -8021,7 +8021,7 @@
         </p:nvSpPr>
         <p:spPr>
           <a:xfrm>
-            <a:off x="8448484" y="4660514"/>
+            <a:off x="8448484" y="4999939"/>
             <a:ext cx="182880" cy="182880"/>
           </a:xfrm>
           <a:prstGeom prst="diamond">
@@ -8052,7 +8052,7 @@
         </p:nvSpPr>
         <p:spPr>
           <a:xfrm>
-            <a:off x="8224201" y="4403385"/>
+            <a:off x="8224201" y="4723790"/>
             <a:ext cx="631448" cy="182880"/>
           </a:xfrm>
           <a:prstGeom prst="rect">
@@ -8091,7 +8091,7 @@
         </p:nvCxnSpPr>
         <p:spPr>
           <a:xfrm>
-            <a:off x="502920" y="4956048"/>
+            <a:off x="502920" y="5321808"/>
             <a:ext cx="11185855" cy="0"/>
           </a:xfrm>
           <a:prstGeom prst="line">
@@ -8112,8 +8112,8 @@
         </p:nvSpPr>
         <p:spPr>
           <a:xfrm>
-            <a:off x="502920" y="4956048"/>
-            <a:ext cx="2651760" cy="566928"/>
+            <a:off x="502920" y="5321808"/>
+            <a:ext cx="2651760" cy="640080"/>
           </a:xfrm>
           <a:prstGeom prst="rect">
             <a:avLst/>
@@ -8151,8 +8151,8 @@
         </p:nvSpPr>
         <p:spPr>
           <a:xfrm>
-            <a:off x="7517740" y="5092111"/>
-            <a:ext cx="4143604" cy="294803"/>
+            <a:off x="7517740" y="5475427"/>
+            <a:ext cx="4143604" cy="332842"/>
           </a:xfrm>
           <a:prstGeom prst="rect">
             <a:avLst/>
@@ -8180,8 +8180,8 @@
         </p:nvSpPr>
         <p:spPr>
           <a:xfrm>
-            <a:off x="7572604" y="5092111"/>
-            <a:ext cx="4033876" cy="294803"/>
+            <a:off x="7572604" y="5475427"/>
+            <a:ext cx="4033876" cy="332842"/>
           </a:xfrm>
           <a:prstGeom prst="rect">
             <a:avLst/>
@@ -8219,7 +8219,7 @@
         </p:nvCxnSpPr>
         <p:spPr>
           <a:xfrm>
-            <a:off x="502920" y="5522976"/>
+            <a:off x="502920" y="5961888"/>
             <a:ext cx="11185855" cy="0"/>
           </a:xfrm>
           <a:prstGeom prst="line">
@@ -12055,7 +12055,7 @@
         <p:spPr>
           <a:xfrm>
             <a:off x="502920" y="1481328"/>
-            <a:ext cx="2494712" cy="566928"/>
+            <a:ext cx="2494712" cy="514350"/>
           </a:xfrm>
           <a:prstGeom prst="rect">
             <a:avLst/>
@@ -12093,8 +12093,8 @@
         </p:nvSpPr>
         <p:spPr>
           <a:xfrm>
-            <a:off x="502920" y="2048256"/>
-            <a:ext cx="2494712" cy="237744"/>
+            <a:off x="502920" y="1995678"/>
+            <a:ext cx="2494712" cy="209550"/>
           </a:xfrm>
           <a:prstGeom prst="rect">
             <a:avLst/>
@@ -12132,7 +12132,7 @@
         </p:nvSpPr>
         <p:spPr>
           <a:xfrm>
-            <a:off x="502920" y="2304288"/>
+            <a:off x="502920" y="2205228"/>
             <a:ext cx="2494712" cy="209169"/>
           </a:xfrm>
           <a:prstGeom prst="rect">
@@ -12193,7 +12193,7 @@
         <p:spPr>
           <a:xfrm>
             <a:off x="3399968" y="1481328"/>
-            <a:ext cx="2494712" cy="566928"/>
+            <a:ext cx="2494712" cy="514350"/>
           </a:xfrm>
           <a:prstGeom prst="rect">
             <a:avLst/>
@@ -12231,8 +12231,8 @@
         </p:nvSpPr>
         <p:spPr>
           <a:xfrm>
-            <a:off x="3399968" y="2048256"/>
-            <a:ext cx="2494712" cy="237744"/>
+            <a:off x="3399968" y="1995678"/>
+            <a:ext cx="2494712" cy="209550"/>
           </a:xfrm>
           <a:prstGeom prst="rect">
             <a:avLst/>
@@ -12270,7 +12270,7 @@
         </p:nvSpPr>
         <p:spPr>
           <a:xfrm>
-            <a:off x="3399968" y="2304288"/>
+            <a:off x="3399968" y="2205228"/>
             <a:ext cx="2494712" cy="209169"/>
           </a:xfrm>
           <a:prstGeom prst="rect">
@@ -12331,7 +12331,7 @@
         <p:spPr>
           <a:xfrm>
             <a:off x="6297016" y="1481328"/>
-            <a:ext cx="2494712" cy="566928"/>
+            <a:ext cx="2494712" cy="514350"/>
           </a:xfrm>
           <a:prstGeom prst="rect">
             <a:avLst/>
@@ -12369,8 +12369,8 @@
         </p:nvSpPr>
         <p:spPr>
           <a:xfrm>
-            <a:off x="6297016" y="2048256"/>
-            <a:ext cx="2494712" cy="237744"/>
+            <a:off x="6297016" y="1995678"/>
+            <a:ext cx="2494712" cy="209550"/>
           </a:xfrm>
           <a:prstGeom prst="rect">
             <a:avLst/>
@@ -12408,7 +12408,7 @@
         </p:nvSpPr>
         <p:spPr>
           <a:xfrm>
-            <a:off x="6297016" y="2304288"/>
+            <a:off x="6297016" y="2205228"/>
             <a:ext cx="2494712" cy="209169"/>
           </a:xfrm>
           <a:prstGeom prst="rect">
@@ -12469,7 +12469,7 @@
         <p:spPr>
           <a:xfrm>
             <a:off x="9194063" y="1481328"/>
-            <a:ext cx="2494712" cy="566928"/>
+            <a:ext cx="2494712" cy="514350"/>
           </a:xfrm>
           <a:prstGeom prst="rect">
             <a:avLst/>
@@ -12507,8 +12507,8 @@
         </p:nvSpPr>
         <p:spPr>
           <a:xfrm>
-            <a:off x="9194063" y="2048256"/>
-            <a:ext cx="2494712" cy="237744"/>
+            <a:off x="9194063" y="1995678"/>
+            <a:ext cx="2494712" cy="209550"/>
           </a:xfrm>
           <a:prstGeom prst="rect">
             <a:avLst/>
@@ -12546,7 +12546,7 @@
         </p:nvSpPr>
         <p:spPr>
           <a:xfrm>
-            <a:off x="9194063" y="2304288"/>
+            <a:off x="9194063" y="2205228"/>
             <a:ext cx="2494712" cy="209169"/>
           </a:xfrm>
           <a:prstGeom prst="rect">
